--- a/lectures/le6_data_visualization/ex6_data_visualization.pptx
+++ b/lectures/le6_data_visualization/ex6_data_visualization.pptx
@@ -198,7 +198,7 @@
           <a:p>
             <a:fld id="{67B06F9D-C771-424C-B7EB-7E8116EDAD2E}" type="datetimeFigureOut">
               <a:rPr lang="en-US" smtClean="0"/>
-              <a:t>2/16/26</a:t>
+              <a:t>2/26/26</a:t>
             </a:fld>
             <a:endParaRPr lang="en-US"/>
           </a:p>
@@ -594,7 +594,7 @@
           <a:p>
             <a:fld id="{CFA08DA6-A8C4-0140-9A74-6D7CB1FD260D}" type="datetimeFigureOut">
               <a:rPr lang="en-US" smtClean="0"/>
-              <a:t>2/16/26</a:t>
+              <a:t>2/26/26</a:t>
             </a:fld>
             <a:endParaRPr lang="en-US"/>
           </a:p>
@@ -762,7 +762,7 @@
           <a:p>
             <a:fld id="{CFA08DA6-A8C4-0140-9A74-6D7CB1FD260D}" type="datetimeFigureOut">
               <a:rPr lang="en-US" smtClean="0"/>
-              <a:t>2/16/26</a:t>
+              <a:t>2/26/26</a:t>
             </a:fld>
             <a:endParaRPr lang="en-US"/>
           </a:p>
@@ -940,7 +940,7 @@
           <a:p>
             <a:fld id="{CFA08DA6-A8C4-0140-9A74-6D7CB1FD260D}" type="datetimeFigureOut">
               <a:rPr lang="en-US" smtClean="0"/>
-              <a:t>2/16/26</a:t>
+              <a:t>2/26/26</a:t>
             </a:fld>
             <a:endParaRPr lang="en-US"/>
           </a:p>
@@ -1108,7 +1108,7 @@
           <a:p>
             <a:fld id="{CFA08DA6-A8C4-0140-9A74-6D7CB1FD260D}" type="datetimeFigureOut">
               <a:rPr lang="en-US" smtClean="0"/>
-              <a:t>2/16/26</a:t>
+              <a:t>2/26/26</a:t>
             </a:fld>
             <a:endParaRPr lang="en-US"/>
           </a:p>
@@ -1353,7 +1353,7 @@
           <a:p>
             <a:fld id="{CFA08DA6-A8C4-0140-9A74-6D7CB1FD260D}" type="datetimeFigureOut">
               <a:rPr lang="en-US" smtClean="0"/>
-              <a:t>2/16/26</a:t>
+              <a:t>2/26/26</a:t>
             </a:fld>
             <a:endParaRPr lang="en-US"/>
           </a:p>
@@ -1582,7 +1582,7 @@
           <a:p>
             <a:fld id="{CFA08DA6-A8C4-0140-9A74-6D7CB1FD260D}" type="datetimeFigureOut">
               <a:rPr lang="en-US" smtClean="0"/>
-              <a:t>2/16/26</a:t>
+              <a:t>2/26/26</a:t>
             </a:fld>
             <a:endParaRPr lang="en-US"/>
           </a:p>
@@ -1946,7 +1946,7 @@
           <a:p>
             <a:fld id="{CFA08DA6-A8C4-0140-9A74-6D7CB1FD260D}" type="datetimeFigureOut">
               <a:rPr lang="en-US" smtClean="0"/>
-              <a:t>2/16/26</a:t>
+              <a:t>2/26/26</a:t>
             </a:fld>
             <a:endParaRPr lang="en-US"/>
           </a:p>
@@ -2063,7 +2063,7 @@
           <a:p>
             <a:fld id="{CFA08DA6-A8C4-0140-9A74-6D7CB1FD260D}" type="datetimeFigureOut">
               <a:rPr lang="en-US" smtClean="0"/>
-              <a:t>2/16/26</a:t>
+              <a:t>2/26/26</a:t>
             </a:fld>
             <a:endParaRPr lang="en-US"/>
           </a:p>
@@ -2158,7 +2158,7 @@
           <a:p>
             <a:fld id="{CFA08DA6-A8C4-0140-9A74-6D7CB1FD260D}" type="datetimeFigureOut">
               <a:rPr lang="en-US" smtClean="0"/>
-              <a:t>2/16/26</a:t>
+              <a:t>2/26/26</a:t>
             </a:fld>
             <a:endParaRPr lang="en-US"/>
           </a:p>
@@ -2433,7 +2433,7 @@
           <a:p>
             <a:fld id="{CFA08DA6-A8C4-0140-9A74-6D7CB1FD260D}" type="datetimeFigureOut">
               <a:rPr lang="en-US" smtClean="0"/>
-              <a:t>2/16/26</a:t>
+              <a:t>2/26/26</a:t>
             </a:fld>
             <a:endParaRPr lang="en-US"/>
           </a:p>
@@ -2685,7 +2685,7 @@
           <a:p>
             <a:fld id="{CFA08DA6-A8C4-0140-9A74-6D7CB1FD260D}" type="datetimeFigureOut">
               <a:rPr lang="en-US" smtClean="0"/>
-              <a:t>2/16/26</a:t>
+              <a:t>2/26/26</a:t>
             </a:fld>
             <a:endParaRPr lang="en-US"/>
           </a:p>
@@ -2896,7 +2896,7 @@
           <a:p>
             <a:fld id="{CFA08DA6-A8C4-0140-9A74-6D7CB1FD260D}" type="datetimeFigureOut">
               <a:rPr lang="en-US" smtClean="0"/>
-              <a:t>2/16/26</a:t>
+              <a:t>2/26/26</a:t>
             </a:fld>
             <a:endParaRPr lang="en-US"/>
           </a:p>
@@ -3432,7 +3432,7 @@
             <a:pPr algn="ctr"/>
             <a:r>
               <a:rPr lang="en-US" sz="3200" dirty="0"/>
-              <a:t>Exercises week 3 </a:t>
+              <a:t>Exercises week 6 </a:t>
             </a:r>
             <a:r>
               <a:rPr lang="mr-IN" sz="3200" dirty="0"/>
@@ -3539,7 +3539,7 @@
             </a:pPr>
             <a:r>
               <a:rPr lang="en-US" dirty="0"/>
-              <a:t>Call your script file “week3_firstnamelastname.R”</a:t>
+              <a:t>Call your script file “week6_firstnamelastname.R”</a:t>
             </a:r>
           </a:p>
           <a:p>
